--- a/class/cloud_infra_mgmt/02주차_Docker기초/01_강의자료/2차시_BindMount실습.pptx
+++ b/class/cloud_infra_mgmt/02주차_Docker기초/01_강의자료/2차시_BindMount실습.pptx
@@ -8808,7 +8808,7 @@
               </a:lnSpc>
             </a:pPr>
             <a:r>
-              <a:rPr sz="1500" b="1">
+              <a:rPr sz="1700" b="1">
                 <a:solidFill>
                   <a:srgbClr val="0D9488"/>
                 </a:solidFill>
@@ -8817,7 +8817,7 @@
               <a:t>●  </a:t>
             </a:r>
             <a:r>
-              <a:rPr sz="1500" b="0">
+              <a:rPr sz="1700" b="0">
                 <a:solidFill>
                   <a:srgbClr val="222733"/>
                 </a:solidFill>
@@ -8833,7 +8833,7 @@
               </a:lnSpc>
             </a:pPr>
             <a:r>
-              <a:rPr sz="1500" b="1">
+              <a:rPr sz="1700" b="1">
                 <a:solidFill>
                   <a:srgbClr val="0D9488"/>
                 </a:solidFill>
@@ -8842,7 +8842,7 @@
               <a:t>●  </a:t>
             </a:r>
             <a:r>
-              <a:rPr sz="1500" b="0">
+              <a:rPr sz="1700" b="0">
                 <a:solidFill>
                   <a:srgbClr val="222733"/>
                 </a:solidFill>
@@ -8858,7 +8858,7 @@
               </a:lnSpc>
             </a:pPr>
             <a:r>
-              <a:rPr sz="1500" b="1">
+              <a:rPr sz="1700" b="1">
                 <a:solidFill>
                   <a:srgbClr val="0D9488"/>
                 </a:solidFill>
@@ -8867,7 +8867,7 @@
               <a:t>●  </a:t>
             </a:r>
             <a:r>
-              <a:rPr sz="1500" b="0">
+              <a:rPr sz="1700" b="0">
                 <a:solidFill>
                   <a:srgbClr val="222733"/>
                 </a:solidFill>

--- a/class/cloud_infra_mgmt/02주차_Docker기초/01_강의자료/2차시_BindMount실습.pptx
+++ b/class/cloud_infra_mgmt/02주차_Docker기초/01_강의자료/2차시_BindMount실습.pptx
@@ -5103,7 +5103,7 @@
           <a:p>
             <a:pPr>
               <a:lnSpc>
-                <a:spcPct val="115000"/>
+                <a:spcPct val="149500"/>
               </a:lnSpc>
             </a:pPr>
             <a:r>
@@ -5128,7 +5128,7 @@
           <a:p>
             <a:pPr>
               <a:lnSpc>
-                <a:spcPct val="115000"/>
+                <a:spcPct val="149500"/>
               </a:lnSpc>
             </a:pPr>
             <a:r>
@@ -5153,7 +5153,7 @@
           <a:p>
             <a:pPr>
               <a:lnSpc>
-                <a:spcPct val="115000"/>
+                <a:spcPct val="149500"/>
               </a:lnSpc>
             </a:pPr>
             <a:r>
@@ -6402,16 +6402,104 @@
       </p:sp>
       <p:sp>
         <p:nvSpPr>
-          <p:cNvPr id="7" name="Isosceles Triangle 6"/>
+          <p:cNvPr id="7" name="Rectangle 6"/>
           <p:cNvSpPr/>
           <p:nvPr/>
         </p:nvSpPr>
         <p:spPr>
-          <a:xfrm rot="5400000">
-            <a:off x="3495751" y="1673352"/>
-            <a:ext cx="146304" cy="146304"/>
-          </a:xfrm>
-          <a:prstGeom prst="triangle">
+          <a:xfrm>
+            <a:off x="5096865" y="1730959"/>
+            <a:ext cx="1995220" cy="31089"/>
+          </a:xfrm>
+          <a:prstGeom prst="rect">
+            <a:avLst/>
+          </a:prstGeom>
+          <a:solidFill>
+            <a:srgbClr val="14B8A6"/>
+          </a:solidFill>
+          <a:ln>
+            <a:noFill/>
+          </a:ln>
+          <a:effectLst/>
+        </p:spPr>
+        <p:style>
+          <a:lnRef idx="1">
+            <a:schemeClr val="accent1"/>
+          </a:lnRef>
+          <a:fillRef idx="3">
+            <a:schemeClr val="accent1"/>
+          </a:fillRef>
+          <a:effectRef idx="2">
+            <a:schemeClr val="accent1"/>
+          </a:effectRef>
+          <a:fontRef idx="minor">
+            <a:schemeClr val="lt1"/>
+          </a:fontRef>
+        </p:style>
+        <p:txBody>
+          <a:bodyPr rtlCol="0" anchor="ctr"/>
+          <a:lstStyle/>
+          <a:p>
+            <a:pPr algn="ctr"/>
+          </a:p>
+        </p:txBody>
+      </p:sp>
+      <p:sp>
+        <p:nvSpPr>
+          <p:cNvPr id="8" name="Rectangle 7"/>
+          <p:cNvSpPr/>
+          <p:nvPr/>
+        </p:nvSpPr>
+        <p:spPr>
+          <a:xfrm>
+            <a:off x="7622438" y="1730959"/>
+            <a:ext cx="1995220" cy="31089"/>
+          </a:xfrm>
+          <a:prstGeom prst="rect">
+            <a:avLst/>
+          </a:prstGeom>
+          <a:solidFill>
+            <a:srgbClr val="14B8A6"/>
+          </a:solidFill>
+          <a:ln>
+            <a:noFill/>
+          </a:ln>
+          <a:effectLst/>
+        </p:spPr>
+        <p:style>
+          <a:lnRef idx="1">
+            <a:schemeClr val="accent1"/>
+          </a:lnRef>
+          <a:fillRef idx="3">
+            <a:schemeClr val="accent1"/>
+          </a:fillRef>
+          <a:effectRef idx="2">
+            <a:schemeClr val="accent1"/>
+          </a:effectRef>
+          <a:fontRef idx="minor">
+            <a:schemeClr val="lt1"/>
+          </a:fontRef>
+        </p:style>
+        <p:txBody>
+          <a:bodyPr rtlCol="0" anchor="ctr"/>
+          <a:lstStyle/>
+          <a:p>
+            <a:pPr algn="ctr"/>
+          </a:p>
+        </p:txBody>
+      </p:sp>
+      <p:sp>
+        <p:nvSpPr>
+          <p:cNvPr id="9" name="Oval 8"/>
+          <p:cNvSpPr/>
+          <p:nvPr/>
+        </p:nvSpPr>
+        <p:spPr>
+          <a:xfrm>
+            <a:off x="2040940" y="1481328"/>
+            <a:ext cx="530352" cy="530352"/>
+          </a:xfrm>
+          <a:prstGeom prst="ellipse">
             <a:avLst/>
           </a:prstGeom>
           <a:solidFill>
@@ -6446,227 +6534,7 @@
       </p:sp>
       <p:sp>
         <p:nvSpPr>
-          <p:cNvPr id="8" name="Rectangle 7"/>
-          <p:cNvSpPr/>
-          <p:nvPr/>
-        </p:nvSpPr>
-        <p:spPr>
-          <a:xfrm>
-            <a:off x="5096865" y="1730959"/>
-            <a:ext cx="1995220" cy="31089"/>
-          </a:xfrm>
-          <a:prstGeom prst="rect">
-            <a:avLst/>
-          </a:prstGeom>
-          <a:solidFill>
-            <a:srgbClr val="14B8A6"/>
-          </a:solidFill>
-          <a:ln>
-            <a:noFill/>
-          </a:ln>
-          <a:effectLst/>
-        </p:spPr>
-        <p:style>
-          <a:lnRef idx="1">
-            <a:schemeClr val="accent1"/>
-          </a:lnRef>
-          <a:fillRef idx="3">
-            <a:schemeClr val="accent1"/>
-          </a:fillRef>
-          <a:effectRef idx="2">
-            <a:schemeClr val="accent1"/>
-          </a:effectRef>
-          <a:fontRef idx="minor">
-            <a:schemeClr val="lt1"/>
-          </a:fontRef>
-        </p:style>
-        <p:txBody>
-          <a:bodyPr rtlCol="0" anchor="ctr"/>
-          <a:lstStyle/>
-          <a:p>
-            <a:pPr algn="ctr"/>
-          </a:p>
-        </p:txBody>
-      </p:sp>
-      <p:sp>
-        <p:nvSpPr>
-          <p:cNvPr id="9" name="Isosceles Triangle 8"/>
-          <p:cNvSpPr/>
-          <p:nvPr/>
-        </p:nvSpPr>
-        <p:spPr>
-          <a:xfrm rot="5400000">
-            <a:off x="6021324" y="1673352"/>
-            <a:ext cx="146304" cy="146304"/>
-          </a:xfrm>
-          <a:prstGeom prst="triangle">
-            <a:avLst/>
-          </a:prstGeom>
-          <a:solidFill>
-            <a:srgbClr val="0D9488"/>
-          </a:solidFill>
-          <a:ln>
-            <a:noFill/>
-          </a:ln>
-          <a:effectLst/>
-        </p:spPr>
-        <p:style>
-          <a:lnRef idx="1">
-            <a:schemeClr val="accent1"/>
-          </a:lnRef>
-          <a:fillRef idx="3">
-            <a:schemeClr val="accent1"/>
-          </a:fillRef>
-          <a:effectRef idx="2">
-            <a:schemeClr val="accent1"/>
-          </a:effectRef>
-          <a:fontRef idx="minor">
-            <a:schemeClr val="lt1"/>
-          </a:fontRef>
-        </p:style>
-        <p:txBody>
-          <a:bodyPr rtlCol="0" anchor="ctr"/>
-          <a:lstStyle/>
-          <a:p>
-            <a:pPr algn="ctr"/>
-          </a:p>
-        </p:txBody>
-      </p:sp>
-      <p:sp>
-        <p:nvSpPr>
-          <p:cNvPr id="10" name="Rectangle 9"/>
-          <p:cNvSpPr/>
-          <p:nvPr/>
-        </p:nvSpPr>
-        <p:spPr>
-          <a:xfrm>
-            <a:off x="7622438" y="1730959"/>
-            <a:ext cx="1995220" cy="31089"/>
-          </a:xfrm>
-          <a:prstGeom prst="rect">
-            <a:avLst/>
-          </a:prstGeom>
-          <a:solidFill>
-            <a:srgbClr val="14B8A6"/>
-          </a:solidFill>
-          <a:ln>
-            <a:noFill/>
-          </a:ln>
-          <a:effectLst/>
-        </p:spPr>
-        <p:style>
-          <a:lnRef idx="1">
-            <a:schemeClr val="accent1"/>
-          </a:lnRef>
-          <a:fillRef idx="3">
-            <a:schemeClr val="accent1"/>
-          </a:fillRef>
-          <a:effectRef idx="2">
-            <a:schemeClr val="accent1"/>
-          </a:effectRef>
-          <a:fontRef idx="minor">
-            <a:schemeClr val="lt1"/>
-          </a:fontRef>
-        </p:style>
-        <p:txBody>
-          <a:bodyPr rtlCol="0" anchor="ctr"/>
-          <a:lstStyle/>
-          <a:p>
-            <a:pPr algn="ctr"/>
-          </a:p>
-        </p:txBody>
-      </p:sp>
-      <p:sp>
-        <p:nvSpPr>
-          <p:cNvPr id="11" name="Isosceles Triangle 10"/>
-          <p:cNvSpPr/>
-          <p:nvPr/>
-        </p:nvSpPr>
-        <p:spPr>
-          <a:xfrm rot="5400000">
-            <a:off x="8546896" y="1673352"/>
-            <a:ext cx="146304" cy="146304"/>
-          </a:xfrm>
-          <a:prstGeom prst="triangle">
-            <a:avLst/>
-          </a:prstGeom>
-          <a:solidFill>
-            <a:srgbClr val="0D9488"/>
-          </a:solidFill>
-          <a:ln>
-            <a:noFill/>
-          </a:ln>
-          <a:effectLst/>
-        </p:spPr>
-        <p:style>
-          <a:lnRef idx="1">
-            <a:schemeClr val="accent1"/>
-          </a:lnRef>
-          <a:fillRef idx="3">
-            <a:schemeClr val="accent1"/>
-          </a:fillRef>
-          <a:effectRef idx="2">
-            <a:schemeClr val="accent1"/>
-          </a:effectRef>
-          <a:fontRef idx="minor">
-            <a:schemeClr val="lt1"/>
-          </a:fontRef>
-        </p:style>
-        <p:txBody>
-          <a:bodyPr rtlCol="0" anchor="ctr"/>
-          <a:lstStyle/>
-          <a:p>
-            <a:pPr algn="ctr"/>
-          </a:p>
-        </p:txBody>
-      </p:sp>
-      <p:sp>
-        <p:nvSpPr>
-          <p:cNvPr id="12" name="Oval 11"/>
-          <p:cNvSpPr/>
-          <p:nvPr/>
-        </p:nvSpPr>
-        <p:spPr>
-          <a:xfrm>
-            <a:off x="2040940" y="1481328"/>
-            <a:ext cx="530352" cy="530352"/>
-          </a:xfrm>
-          <a:prstGeom prst="ellipse">
-            <a:avLst/>
-          </a:prstGeom>
-          <a:solidFill>
-            <a:srgbClr val="0D9488"/>
-          </a:solidFill>
-          <a:ln>
-            <a:noFill/>
-          </a:ln>
-          <a:effectLst/>
-        </p:spPr>
-        <p:style>
-          <a:lnRef idx="1">
-            <a:schemeClr val="accent1"/>
-          </a:lnRef>
-          <a:fillRef idx="3">
-            <a:schemeClr val="accent1"/>
-          </a:fillRef>
-          <a:effectRef idx="2">
-            <a:schemeClr val="accent1"/>
-          </a:effectRef>
-          <a:fontRef idx="minor">
-            <a:schemeClr val="lt1"/>
-          </a:fontRef>
-        </p:style>
-        <p:txBody>
-          <a:bodyPr rtlCol="0" anchor="ctr"/>
-          <a:lstStyle/>
-          <a:p>
-            <a:pPr algn="ctr"/>
-          </a:p>
-        </p:txBody>
-      </p:sp>
-      <p:sp>
-        <p:nvSpPr>
-          <p:cNvPr id="13" name="TextBox 12"/>
+          <p:cNvPr id="10" name="TextBox 9"/>
           <p:cNvSpPr txBox="1"/>
           <p:nvPr/>
         </p:nvSpPr>
@@ -6701,7 +6569,7 @@
       </p:sp>
       <p:sp>
         <p:nvSpPr>
-          <p:cNvPr id="14" name="Rounded Rectangle 13"/>
+          <p:cNvPr id="11" name="Rounded Rectangle 10"/>
           <p:cNvSpPr/>
           <p:nvPr/>
         </p:nvSpPr>
@@ -6749,7 +6617,7 @@
       </p:sp>
       <p:sp>
         <p:nvSpPr>
-          <p:cNvPr id="15" name="TextBox 14"/>
+          <p:cNvPr id="12" name="TextBox 11"/>
           <p:cNvSpPr txBox="1"/>
           <p:nvPr/>
         </p:nvSpPr>
@@ -6784,7 +6652,7 @@
       </p:sp>
       <p:sp>
         <p:nvSpPr>
-          <p:cNvPr id="16" name="TextBox 15"/>
+          <p:cNvPr id="13" name="TextBox 12"/>
           <p:cNvSpPr txBox="1"/>
           <p:nvPr/>
         </p:nvSpPr>
@@ -6823,7 +6691,7 @@
       </p:sp>
       <p:sp>
         <p:nvSpPr>
-          <p:cNvPr id="17" name="Oval 16"/>
+          <p:cNvPr id="14" name="Oval 13"/>
           <p:cNvSpPr/>
           <p:nvPr/>
         </p:nvSpPr>
@@ -6867,7 +6735,7 @@
       </p:sp>
       <p:sp>
         <p:nvSpPr>
-          <p:cNvPr id="18" name="TextBox 17"/>
+          <p:cNvPr id="15" name="TextBox 14"/>
           <p:cNvSpPr txBox="1"/>
           <p:nvPr/>
         </p:nvSpPr>
@@ -6902,7 +6770,7 @@
       </p:sp>
       <p:sp>
         <p:nvSpPr>
-          <p:cNvPr id="19" name="Rounded Rectangle 18"/>
+          <p:cNvPr id="16" name="Rounded Rectangle 15"/>
           <p:cNvSpPr/>
           <p:nvPr/>
         </p:nvSpPr>
@@ -6950,7 +6818,7 @@
       </p:sp>
       <p:sp>
         <p:nvSpPr>
-          <p:cNvPr id="20" name="TextBox 19"/>
+          <p:cNvPr id="17" name="TextBox 16"/>
           <p:cNvSpPr txBox="1"/>
           <p:nvPr/>
         </p:nvSpPr>
@@ -6985,7 +6853,7 @@
       </p:sp>
       <p:sp>
         <p:nvSpPr>
-          <p:cNvPr id="21" name="TextBox 20"/>
+          <p:cNvPr id="18" name="TextBox 17"/>
           <p:cNvSpPr txBox="1"/>
           <p:nvPr/>
         </p:nvSpPr>
@@ -7024,7 +6892,7 @@
       </p:sp>
       <p:sp>
         <p:nvSpPr>
-          <p:cNvPr id="22" name="Oval 21"/>
+          <p:cNvPr id="19" name="Oval 18"/>
           <p:cNvSpPr/>
           <p:nvPr/>
         </p:nvSpPr>
@@ -7068,7 +6936,7 @@
       </p:sp>
       <p:sp>
         <p:nvSpPr>
-          <p:cNvPr id="23" name="TextBox 22"/>
+          <p:cNvPr id="20" name="TextBox 19"/>
           <p:cNvSpPr txBox="1"/>
           <p:nvPr/>
         </p:nvSpPr>
@@ -7103,7 +6971,7 @@
       </p:sp>
       <p:sp>
         <p:nvSpPr>
-          <p:cNvPr id="24" name="Rounded Rectangle 23"/>
+          <p:cNvPr id="21" name="Rounded Rectangle 20"/>
           <p:cNvSpPr/>
           <p:nvPr/>
         </p:nvSpPr>
@@ -7151,7 +7019,7 @@
       </p:sp>
       <p:sp>
         <p:nvSpPr>
-          <p:cNvPr id="25" name="TextBox 24"/>
+          <p:cNvPr id="22" name="TextBox 21"/>
           <p:cNvSpPr txBox="1"/>
           <p:nvPr/>
         </p:nvSpPr>
@@ -7186,7 +7054,7 @@
       </p:sp>
       <p:sp>
         <p:nvSpPr>
-          <p:cNvPr id="26" name="TextBox 25"/>
+          <p:cNvPr id="23" name="TextBox 22"/>
           <p:cNvSpPr txBox="1"/>
           <p:nvPr/>
         </p:nvSpPr>
@@ -7225,7 +7093,7 @@
       </p:sp>
       <p:sp>
         <p:nvSpPr>
-          <p:cNvPr id="27" name="Oval 26"/>
+          <p:cNvPr id="24" name="Oval 23"/>
           <p:cNvSpPr/>
           <p:nvPr/>
         </p:nvSpPr>
@@ -7269,7 +7137,7 @@
       </p:sp>
       <p:sp>
         <p:nvSpPr>
-          <p:cNvPr id="28" name="TextBox 27"/>
+          <p:cNvPr id="25" name="TextBox 24"/>
           <p:cNvSpPr txBox="1"/>
           <p:nvPr/>
         </p:nvSpPr>
@@ -7304,7 +7172,7 @@
       </p:sp>
       <p:sp>
         <p:nvSpPr>
-          <p:cNvPr id="29" name="Rounded Rectangle 28"/>
+          <p:cNvPr id="26" name="Rounded Rectangle 25"/>
           <p:cNvSpPr/>
           <p:nvPr/>
         </p:nvSpPr>
@@ -7352,7 +7220,7 @@
       </p:sp>
       <p:sp>
         <p:nvSpPr>
-          <p:cNvPr id="30" name="TextBox 29"/>
+          <p:cNvPr id="27" name="TextBox 26"/>
           <p:cNvSpPr txBox="1"/>
           <p:nvPr/>
         </p:nvSpPr>
@@ -7387,7 +7255,7 @@
       </p:sp>
       <p:sp>
         <p:nvSpPr>
-          <p:cNvPr id="31" name="TextBox 30"/>
+          <p:cNvPr id="28" name="TextBox 27"/>
           <p:cNvSpPr txBox="1"/>
           <p:nvPr/>
         </p:nvSpPr>
@@ -7426,7 +7294,7 @@
       </p:sp>
       <p:sp>
         <p:nvSpPr>
-          <p:cNvPr id="32" name="TextBox 31"/>
+          <p:cNvPr id="29" name="TextBox 28"/>
           <p:cNvSpPr txBox="1"/>
           <p:nvPr/>
         </p:nvSpPr>
@@ -7461,7 +7329,7 @@
       </p:sp>
       <p:sp>
         <p:nvSpPr>
-          <p:cNvPr id="33" name="TextBox 32"/>
+          <p:cNvPr id="30" name="TextBox 29"/>
           <p:cNvSpPr txBox="1"/>
           <p:nvPr/>
         </p:nvSpPr>
@@ -7496,7 +7364,7 @@
       </p:sp>
       <p:sp>
         <p:nvSpPr>
-          <p:cNvPr id="34" name="Rectangle 33"/>
+          <p:cNvPr id="31" name="Rectangle 30"/>
           <p:cNvSpPr/>
           <p:nvPr/>
         </p:nvSpPr>
@@ -8020,7 +7888,7 @@
           <a:p>
             <a:pPr>
               <a:lnSpc>
-                <a:spcPct val="115000"/>
+                <a:spcPct val="149500"/>
               </a:lnSpc>
             </a:pPr>
             <a:r>
@@ -8045,7 +7913,7 @@
           <a:p>
             <a:pPr>
               <a:lnSpc>
-                <a:spcPct val="115000"/>
+                <a:spcPct val="149500"/>
               </a:lnSpc>
             </a:pPr>
             <a:r>
@@ -8070,7 +7938,7 @@
           <a:p>
             <a:pPr>
               <a:lnSpc>
-                <a:spcPct val="115000"/>
+                <a:spcPct val="149500"/>
               </a:lnSpc>
             </a:pPr>
             <a:r>
@@ -8804,7 +8672,7 @@
           <a:p>
             <a:pPr>
               <a:lnSpc>
-                <a:spcPct val="115000"/>
+                <a:spcPct val="149500"/>
               </a:lnSpc>
             </a:pPr>
             <a:r>
@@ -8829,7 +8697,7 @@
           <a:p>
             <a:pPr>
               <a:lnSpc>
-                <a:spcPct val="115000"/>
+                <a:spcPct val="149500"/>
               </a:lnSpc>
             </a:pPr>
             <a:r>
@@ -8854,7 +8722,7 @@
           <a:p>
             <a:pPr>
               <a:lnSpc>
-                <a:spcPct val="115000"/>
+                <a:spcPct val="149500"/>
               </a:lnSpc>
             </a:pPr>
             <a:r>
@@ -9517,7 +9385,7 @@
           <a:p>
             <a:pPr>
               <a:lnSpc>
-                <a:spcPct val="115000"/>
+                <a:spcPct val="149500"/>
               </a:lnSpc>
             </a:pPr>
             <a:r>
@@ -9542,7 +9410,7 @@
           <a:p>
             <a:pPr>
               <a:lnSpc>
-                <a:spcPct val="115000"/>
+                <a:spcPct val="149500"/>
               </a:lnSpc>
             </a:pPr>
             <a:r>
@@ -9567,7 +9435,7 @@
           <a:p>
             <a:pPr>
               <a:lnSpc>
-                <a:spcPct val="115000"/>
+                <a:spcPct val="149500"/>
               </a:lnSpc>
             </a:pPr>
             <a:r>
@@ -9592,7 +9460,7 @@
           <a:p>
             <a:pPr>
               <a:lnSpc>
-                <a:spcPct val="115000"/>
+                <a:spcPct val="149500"/>
               </a:lnSpc>
             </a:pPr>
             <a:r>
@@ -9983,7 +9851,7 @@
           <a:p>
             <a:pPr>
               <a:lnSpc>
-                <a:spcPct val="115000"/>
+                <a:spcPct val="149500"/>
               </a:lnSpc>
             </a:pPr>
             <a:r>
@@ -10008,7 +9876,7 @@
           <a:p>
             <a:pPr>
               <a:lnSpc>
-                <a:spcPct val="115000"/>
+                <a:spcPct val="149500"/>
               </a:lnSpc>
             </a:pPr>
             <a:r>
@@ -10033,7 +9901,7 @@
           <a:p>
             <a:pPr>
               <a:lnSpc>
-                <a:spcPct val="115000"/>
+                <a:spcPct val="149500"/>
               </a:lnSpc>
             </a:pPr>
             <a:r>
@@ -10058,7 +9926,7 @@
           <a:p>
             <a:pPr>
               <a:lnSpc>
-                <a:spcPct val="115000"/>
+                <a:spcPct val="149500"/>
               </a:lnSpc>
             </a:pPr>
             <a:r>

--- a/class/cloud_infra_mgmt/02주차_Docker기초/01_강의자료/2차시_BindMount실습.pptx
+++ b/class/cloud_infra_mgmt/02주차_Docker기초/01_강의자료/2차시_BindMount실습.pptx
@@ -4739,6 +4739,8 @@
                   <a:srgbClr val="14B8A6"/>
                 </a:solidFill>
                 <a:latin typeface="맑은 고딕"/>
+                <a:ea typeface="맑은 고딕"/>
+                <a:cs typeface="맑은 고딕"/>
               </a:rPr>
               <a:t>클라우드인프라관리  ·  2주차 2차시</a:t>
             </a:r>
@@ -4774,6 +4776,8 @@
                   <a:srgbClr val="FFFFFF"/>
                 </a:solidFill>
                 <a:latin typeface="맑은 고딕"/>
+                <a:ea typeface="맑은 고딕"/>
+                <a:cs typeface="맑은 고딕"/>
               </a:rPr>
               <a:t>Bind Mount로 데이터 지키기</a:t>
             </a:r>
@@ -4809,6 +4813,8 @@
                   <a:srgbClr val="C9D3E6"/>
                 </a:solidFill>
                 <a:latin typeface="맑은 고딕"/>
+                <a:ea typeface="맑은 고딕"/>
+                <a:cs typeface="맑은 고딕"/>
               </a:rPr>
               <a:t>컨테이너와 VM 디렉토리를 연결하는 법</a:t>
             </a:r>
@@ -4844,6 +4850,8 @@
                   <a:srgbClr val="FFFFFF"/>
                 </a:solidFill>
                 <a:latin typeface="맑은 고딕"/>
+                <a:ea typeface="맑은 고딕"/>
+                <a:cs typeface="맑은 고딕"/>
               </a:rPr>
               <a:t>영남이공대학교 김지윤교수</a:t>
             </a:r>
@@ -5003,6 +5011,8 @@
                   <a:srgbClr val="14213D"/>
                 </a:solidFill>
                 <a:latin typeface="맑은 고딕"/>
+                <a:ea typeface="맑은 고딕"/>
+                <a:cs typeface="맑은 고딕"/>
               </a:rPr>
               <a:t>03</a:t>
             </a:r>
@@ -5038,6 +5048,8 @@
                   <a:srgbClr val="14B8A6"/>
                 </a:solidFill>
                 <a:latin typeface="맑은 고딕"/>
+                <a:ea typeface="맑은 고딕"/>
+                <a:cs typeface="맑은 고딕"/>
               </a:rPr>
               <a:t>실습 안내</a:t>
             </a:r>
@@ -5073,6 +5085,8 @@
                   <a:srgbClr val="FFFFFF"/>
                 </a:solidFill>
                 <a:latin typeface="맑은 고딕"/>
+                <a:ea typeface="맑은 고딕"/>
+                <a:cs typeface="맑은 고딕"/>
               </a:rPr>
               <a:t>VM 과제 — 동일 실습</a:t>
             </a:r>
@@ -5112,6 +5126,8 @@
                   <a:srgbClr val="0D9488"/>
                 </a:solidFill>
                 <a:latin typeface="맑은 고딕"/>
+                <a:ea typeface="맑은 고딕"/>
+                <a:cs typeface="맑은 고딕"/>
               </a:rPr>
               <a:t>●  </a:t>
             </a:r>
@@ -5121,6 +5137,8 @@
                   <a:srgbClr val="222733"/>
                 </a:solidFill>
                 <a:latin typeface="맑은 고딕"/>
+                <a:ea typeface="맑은 고딕"/>
+                <a:cs typeface="맑은 고딕"/>
               </a:rPr>
               <a:t>개인 VM에서 위 4단계를 동일하게 수행</a:t>
             </a:r>
@@ -5137,6 +5155,8 @@
                   <a:srgbClr val="0D9488"/>
                 </a:solidFill>
                 <a:latin typeface="맑은 고딕"/>
+                <a:ea typeface="맑은 고딕"/>
+                <a:cs typeface="맑은 고딕"/>
               </a:rPr>
               <a:t>●  </a:t>
             </a:r>
@@ -5146,6 +5166,8 @@
                   <a:srgbClr val="222733"/>
                 </a:solidFill>
                 <a:latin typeface="맑은 고딕"/>
+                <a:ea typeface="맑은 고딕"/>
+                <a:cs typeface="맑은 고딕"/>
               </a:rPr>
               <a:t>curl 결과 화면 캡처</a:t>
             </a:r>
@@ -5162,6 +5184,8 @@
                   <a:srgbClr val="0D9488"/>
                 </a:solidFill>
                 <a:latin typeface="맑은 고딕"/>
+                <a:ea typeface="맑은 고딕"/>
+                <a:cs typeface="맑은 고딕"/>
               </a:rPr>
               <a:t>●  </a:t>
             </a:r>
@@ -5171,6 +5195,8 @@
                   <a:srgbClr val="222733"/>
                 </a:solidFill>
                 <a:latin typeface="맑은 고딕"/>
+                <a:ea typeface="맑은 고딕"/>
+                <a:cs typeface="맑은 고딕"/>
               </a:rPr>
               <a:t>LMS 과제 게시판에 제출 (다음 3차시에 이어서 실습 예정 — 컨테이너 지우지 말고 그대로 두기)</a:t>
             </a:r>
@@ -5206,6 +5232,8 @@
                   <a:srgbClr val="5B6373"/>
                 </a:solidFill>
                 <a:latin typeface="맑은 고딕"/>
+                <a:ea typeface="맑은 고딕"/>
+                <a:cs typeface="맑은 고딕"/>
               </a:rPr>
               <a:t>클라우드인프라관리  ·  2주차 2차시</a:t>
             </a:r>
@@ -5241,6 +5269,8 @@
                   <a:srgbClr val="5B6373"/>
                 </a:solidFill>
                 <a:latin typeface="맑은 고딕"/>
+                <a:ea typeface="맑은 고딕"/>
+                <a:cs typeface="맑은 고딕"/>
               </a:rPr>
               <a:t>10 / 12</a:t>
             </a:r>
@@ -5426,6 +5456,8 @@
                   <a:srgbClr val="FFFFFF"/>
                 </a:solidFill>
                 <a:latin typeface="맑은 고딕"/>
+                <a:ea typeface="맑은 고딕"/>
+                <a:cs typeface="맑은 고딕"/>
               </a:rPr>
               <a:t>오늘의 정리</a:t>
             </a:r>
@@ -5479,6 +5511,8 @@
                   <a:srgbClr val="14213D"/>
                 </a:solidFill>
                 <a:latin typeface="맑은 고딕"/>
+                <a:ea typeface="맑은 고딕"/>
+                <a:cs typeface="맑은 고딕"/>
               </a:rPr>
               <a:t>1</a:t>
             </a:r>
@@ -5514,6 +5548,8 @@
                   <a:srgbClr val="FFFFFF"/>
                 </a:solidFill>
                 <a:latin typeface="맑은 고딕"/>
+                <a:ea typeface="맑은 고딕"/>
+                <a:cs typeface="맑은 고딕"/>
               </a:rPr>
               <a:t>컨테이너를 지우면 그 안의 데이터도 함께 사라진다</a:t>
             </a:r>
@@ -5567,6 +5603,8 @@
                   <a:srgbClr val="14213D"/>
                 </a:solidFill>
                 <a:latin typeface="맑은 고딕"/>
+                <a:ea typeface="맑은 고딕"/>
+                <a:cs typeface="맑은 고딕"/>
               </a:rPr>
               <a:t>2</a:t>
             </a:r>
@@ -5602,6 +5640,8 @@
                   <a:srgbClr val="FFFFFF"/>
                 </a:solidFill>
                 <a:latin typeface="맑은 고딕"/>
+                <a:ea typeface="맑은 고딕"/>
+                <a:cs typeface="맑은 고딕"/>
               </a:rPr>
               <a:t>Bind Mount로 VM 디렉토리와 컨테이너를 연결하면 데이터가 VM에 남는다</a:t>
             </a:r>
@@ -5743,6 +5783,8 @@
                   <a:srgbClr val="FFFFFF"/>
                 </a:solidFill>
                 <a:latin typeface="맑은 고딕"/>
+                <a:ea typeface="맑은 고딕"/>
+                <a:cs typeface="맑은 고딕"/>
               </a:rPr>
               <a:t>다음 차시 예고</a:t>
             </a:r>
@@ -5778,6 +5820,8 @@
                   <a:srgbClr val="14B8A6"/>
                 </a:solidFill>
                 <a:latin typeface="맑은 고딕"/>
+                <a:ea typeface="맑은 고딕"/>
+                <a:cs typeface="맑은 고딕"/>
               </a:rPr>
               <a:t>다음 차시 예고 — 2주차 3차시</a:t>
             </a:r>
@@ -5813,6 +5857,8 @@
                   <a:srgbClr val="FFFFFF"/>
                 </a:solidFill>
                 <a:latin typeface="맑은 고딕"/>
+                <a:ea typeface="맑은 고딕"/>
+                <a:cs typeface="맑은 고딕"/>
               </a:rPr>
               <a:t>오늘 만든 webvol 컨테이너로 HTML 파일을 수정하면 웹 화면에 실시간으로 반영되는지 확인하고, Named Volume과 Bind Mount를 비교합니다.</a:t>
             </a:r>
@@ -5954,6 +6000,8 @@
                   <a:srgbClr val="14B8A6"/>
                 </a:solidFill>
                 <a:latin typeface="맑은 고딕"/>
+                <a:ea typeface="맑은 고딕"/>
+                <a:cs typeface="맑은 고딕"/>
               </a:rPr>
               <a:t>SESSION OVERVIEW</a:t>
             </a:r>
@@ -5989,6 +6037,8 @@
                   <a:srgbClr val="FFFFFF"/>
                 </a:solidFill>
                 <a:latin typeface="맑은 고딕"/>
+                <a:ea typeface="맑은 고딕"/>
+                <a:cs typeface="맑은 고딕"/>
               </a:rPr>
               <a:t>오늘의 학습 목표</a:t>
             </a:r>
@@ -6028,6 +6078,8 @@
                   <a:srgbClr val="222733"/>
                 </a:solidFill>
                 <a:latin typeface="맑은 고딕"/>
+                <a:ea typeface="맑은 고딕"/>
+                <a:cs typeface="맑은 고딕"/>
               </a:rPr>
               <a:t>1.  컨테이너를 지우면 데이터가 왜 사라지는지 이해한다</a:t>
             </a:r>
@@ -6044,6 +6096,8 @@
                   <a:srgbClr val="222733"/>
                 </a:solidFill>
                 <a:latin typeface="맑은 고딕"/>
+                <a:ea typeface="맑은 고딕"/>
+                <a:cs typeface="맑은 고딕"/>
               </a:rPr>
               <a:t>2.  Bind Mount 개념을 이해한다</a:t>
             </a:r>
@@ -6060,6 +6114,8 @@
                   <a:srgbClr val="222733"/>
                 </a:solidFill>
                 <a:latin typeface="맑은 고딕"/>
+                <a:ea typeface="맑은 고딕"/>
+                <a:cs typeface="맑은 고딕"/>
               </a:rPr>
               <a:t>3.  -v 옵션으로 VM 디렉토리와 컨테이너를 직접 연결해본다</a:t>
             </a:r>
@@ -6095,6 +6151,8 @@
                   <a:srgbClr val="5B6373"/>
                 </a:solidFill>
                 <a:latin typeface="맑은 고딕"/>
+                <a:ea typeface="맑은 고딕"/>
+                <a:cs typeface="맑은 고딕"/>
               </a:rPr>
               <a:t>클라우드인프라관리  ·  2주차 2차시</a:t>
             </a:r>
@@ -6130,6 +6188,8 @@
                   <a:srgbClr val="5B6373"/>
                 </a:solidFill>
                 <a:latin typeface="맑은 고딕"/>
+                <a:ea typeface="맑은 고딕"/>
+                <a:cs typeface="맑은 고딕"/>
               </a:rPr>
               <a:t>02 / 12</a:t>
             </a:r>
@@ -6315,6 +6375,8 @@
                   <a:srgbClr val="14B8A6"/>
                 </a:solidFill>
                 <a:latin typeface="맑은 고딕"/>
+                <a:ea typeface="맑은 고딕"/>
+                <a:cs typeface="맑은 고딕"/>
               </a:rPr>
               <a:t>SESSION OVERVIEW</a:t>
             </a:r>
@@ -6350,6 +6412,8 @@
                   <a:srgbClr val="FFFFFF"/>
                 </a:solidFill>
                 <a:latin typeface="맑은 고딕"/>
+                <a:ea typeface="맑은 고딕"/>
+                <a:cs typeface="맑은 고딕"/>
               </a:rPr>
               <a:t>오늘의 진행 순서</a:t>
             </a:r>
@@ -6561,6 +6625,8 @@
                   <a:srgbClr val="FFFFFF"/>
                 </a:solidFill>
                 <a:latin typeface="맑은 고딕"/>
+                <a:ea typeface="맑은 고딕"/>
+                <a:cs typeface="맑은 고딕"/>
               </a:rPr>
               <a:t>1</a:t>
             </a:r>
@@ -6644,6 +6710,8 @@
                   <a:srgbClr val="14213D"/>
                 </a:solidFill>
                 <a:latin typeface="맑은 고딕"/>
+                <a:ea typeface="맑은 고딕"/>
+                <a:cs typeface="맑은 고딕"/>
               </a:rPr>
               <a:t>개념 설명</a:t>
             </a:r>
@@ -6683,6 +6751,8 @@
                   <a:srgbClr val="222733"/>
                 </a:solidFill>
                 <a:latin typeface="맑은 고딕"/>
+                <a:ea typeface="맑은 고딕"/>
+                <a:cs typeface="맑은 고딕"/>
               </a:rPr>
               <a:t>강의자료 기반 직접 강의</a:t>
             </a:r>
@@ -6762,6 +6832,8 @@
                   <a:srgbClr val="FFFFFF"/>
                 </a:solidFill>
                 <a:latin typeface="맑은 고딕"/>
+                <a:ea typeface="맑은 고딕"/>
+                <a:cs typeface="맑은 고딕"/>
               </a:rPr>
               <a:t>2</a:t>
             </a:r>
@@ -6845,6 +6917,8 @@
                   <a:srgbClr val="14213D"/>
                 </a:solidFill>
                 <a:latin typeface="맑은 고딕"/>
+                <a:ea typeface="맑은 고딕"/>
+                <a:cs typeface="맑은 고딕"/>
               </a:rPr>
               <a:t>Killercoda</a:t>
             </a:r>
@@ -6884,6 +6958,8 @@
                   <a:srgbClr val="222733"/>
                 </a:solidFill>
                 <a:latin typeface="맑은 고딕"/>
+                <a:ea typeface="맑은 고딕"/>
+                <a:cs typeface="맑은 고딕"/>
               </a:rPr>
               <a:t>Bind Mount 실습</a:t>
             </a:r>
@@ -6963,6 +7039,8 @@
                   <a:srgbClr val="FFFFFF"/>
                 </a:solidFill>
                 <a:latin typeface="맑은 고딕"/>
+                <a:ea typeface="맑은 고딕"/>
+                <a:cs typeface="맑은 고딕"/>
               </a:rPr>
               <a:t>3</a:t>
             </a:r>
@@ -7046,6 +7124,8 @@
                   <a:srgbClr val="14213D"/>
                 </a:solidFill>
                 <a:latin typeface="맑은 고딕"/>
+                <a:ea typeface="맑은 고딕"/>
+                <a:cs typeface="맑은 고딕"/>
               </a:rPr>
               <a:t>VM 안내</a:t>
             </a:r>
@@ -7085,6 +7165,8 @@
                   <a:srgbClr val="222733"/>
                 </a:solidFill>
                 <a:latin typeface="맑은 고딕"/>
+                <a:ea typeface="맑은 고딕"/>
+                <a:cs typeface="맑은 고딕"/>
               </a:rPr>
               <a:t>VM에서 동일 실습</a:t>
             </a:r>
@@ -7164,6 +7246,8 @@
                   <a:srgbClr val="FFFFFF"/>
                 </a:solidFill>
                 <a:latin typeface="맑은 고딕"/>
+                <a:ea typeface="맑은 고딕"/>
+                <a:cs typeface="맑은 고딕"/>
               </a:rPr>
               <a:t>4</a:t>
             </a:r>
@@ -7247,6 +7331,8 @@
                   <a:srgbClr val="14213D"/>
                 </a:solidFill>
                 <a:latin typeface="맑은 고딕"/>
+                <a:ea typeface="맑은 고딕"/>
+                <a:cs typeface="맑은 고딕"/>
               </a:rPr>
               <a:t>결과 제출</a:t>
             </a:r>
@@ -7286,6 +7372,8 @@
                   <a:srgbClr val="222733"/>
                 </a:solidFill>
                 <a:latin typeface="맑은 고딕"/>
+                <a:ea typeface="맑은 고딕"/>
+                <a:cs typeface="맑은 고딕"/>
               </a:rPr>
               <a:t>체크리스트 제출</a:t>
             </a:r>
@@ -7321,6 +7409,8 @@
                   <a:srgbClr val="5B6373"/>
                 </a:solidFill>
                 <a:latin typeface="맑은 고딕"/>
+                <a:ea typeface="맑은 고딕"/>
+                <a:cs typeface="맑은 고딕"/>
               </a:rPr>
               <a:t>클라우드인프라관리  ·  2주차 2차시</a:t>
             </a:r>
@@ -7356,6 +7446,8 @@
                   <a:srgbClr val="5B6373"/>
                 </a:solidFill>
                 <a:latin typeface="맑은 고딕"/>
+                <a:ea typeface="맑은 고딕"/>
+                <a:cs typeface="맑은 고딕"/>
               </a:rPr>
               <a:t>03 / 12</a:t>
             </a:r>
@@ -7559,6 +7651,8 @@
                   <a:srgbClr val="14213D"/>
                 </a:solidFill>
                 <a:latin typeface="맑은 고딕"/>
+                <a:ea typeface="맑은 고딕"/>
+                <a:cs typeface="맑은 고딕"/>
               </a:rPr>
               <a:t>PART 01</a:t>
             </a:r>
@@ -7594,6 +7688,8 @@
                   <a:srgbClr val="FFFFFF"/>
                 </a:solidFill>
                 <a:latin typeface="맑은 고딕"/>
+                <a:ea typeface="맑은 고딕"/>
+                <a:cs typeface="맑은 고딕"/>
               </a:rPr>
               <a:t>컨테이너 데이터의 문제</a:t>
             </a:r>
@@ -7629,6 +7725,8 @@
                   <a:srgbClr val="C9D3E6"/>
                 </a:solidFill>
                 <a:latin typeface="맑은 고딕"/>
+                <a:ea typeface="맑은 고딕"/>
+                <a:cs typeface="맑은 고딕"/>
               </a:rPr>
               <a:t>지우면 사라진다</a:t>
             </a:r>
@@ -7788,6 +7886,8 @@
                   <a:srgbClr val="14213D"/>
                 </a:solidFill>
                 <a:latin typeface="맑은 고딕"/>
+                <a:ea typeface="맑은 고딕"/>
+                <a:cs typeface="맑은 고딕"/>
               </a:rPr>
               <a:t>01</a:t>
             </a:r>
@@ -7823,6 +7923,8 @@
                   <a:srgbClr val="14B8A6"/>
                 </a:solidFill>
                 <a:latin typeface="맑은 고딕"/>
+                <a:ea typeface="맑은 고딕"/>
+                <a:cs typeface="맑은 고딕"/>
               </a:rPr>
               <a:t>PART 1 · 컨테이너 데이터의 문제</a:t>
             </a:r>
@@ -7858,6 +7960,8 @@
                   <a:srgbClr val="FFFFFF"/>
                 </a:solidFill>
                 <a:latin typeface="맑은 고딕"/>
+                <a:ea typeface="맑은 고딕"/>
+                <a:cs typeface="맑은 고딕"/>
               </a:rPr>
               <a:t>컨테이너 안 데이터는 왜 사라질까</a:t>
             </a:r>
@@ -7897,6 +8001,8 @@
                   <a:srgbClr val="0D9488"/>
                 </a:solidFill>
                 <a:latin typeface="맑은 고딕"/>
+                <a:ea typeface="맑은 고딕"/>
+                <a:cs typeface="맑은 고딕"/>
               </a:rPr>
               <a:t>●  </a:t>
             </a:r>
@@ -7906,6 +8012,8 @@
                   <a:srgbClr val="222733"/>
                 </a:solidFill>
                 <a:latin typeface="맑은 고딕"/>
+                <a:ea typeface="맑은 고딕"/>
+                <a:cs typeface="맑은 고딕"/>
               </a:rPr>
               <a:t>컨테이너의 파일시스템은 컨테이너 자신에게 속함</a:t>
             </a:r>
@@ -7922,6 +8030,8 @@
                   <a:srgbClr val="0D9488"/>
                 </a:solidFill>
                 <a:latin typeface="맑은 고딕"/>
+                <a:ea typeface="맑은 고딕"/>
+                <a:cs typeface="맑은 고딕"/>
               </a:rPr>
               <a:t>●  </a:t>
             </a:r>
@@ -7931,6 +8041,8 @@
                   <a:srgbClr val="222733"/>
                 </a:solidFill>
                 <a:latin typeface="맑은 고딕"/>
+                <a:ea typeface="맑은 고딕"/>
+                <a:cs typeface="맑은 고딕"/>
               </a:rPr>
               <a:t>지난 시간에 배운 대로, docker rm은 그 컨테이너를 완전히 제거함</a:t>
             </a:r>
@@ -7947,6 +8059,8 @@
                   <a:srgbClr val="0D9488"/>
                 </a:solidFill>
                 <a:latin typeface="맑은 고딕"/>
+                <a:ea typeface="맑은 고딕"/>
+                <a:cs typeface="맑은 고딕"/>
               </a:rPr>
               <a:t>●  </a:t>
             </a:r>
@@ -7956,6 +8070,8 @@
                   <a:srgbClr val="222733"/>
                 </a:solidFill>
                 <a:latin typeface="맑은 고딕"/>
+                <a:ea typeface="맑은 고딕"/>
+                <a:cs typeface="맑은 고딕"/>
               </a:rPr>
               <a:t>컨테이너가 사라지면 그 안에 쓴 파일도 함께 사라짐</a:t>
             </a:r>
@@ -8035,6 +8151,8 @@
                   <a:srgbClr val="FFFFFF"/>
                 </a:solidFill>
                 <a:latin typeface="맑은 고딕"/>
+                <a:ea typeface="맑은 고딕"/>
+                <a:cs typeface="맑은 고딕"/>
               </a:rPr>
               <a:t>❗  실무에서는 치명적</a:t>
             </a:r>
@@ -8070,6 +8188,8 @@
                   <a:srgbClr val="FFFFFF"/>
                 </a:solidFill>
                 <a:latin typeface="맑은 고딕"/>
+                <a:ea typeface="맑은 고딕"/>
+                <a:cs typeface="맑은 고딕"/>
               </a:rPr>
               <a:t>웹 서버 컨테이너를 재배포할 때마다 사용자 데이터가 날아간다면 서비스가 불가능하다</a:t>
             </a:r>
@@ -8105,6 +8225,8 @@
                   <a:srgbClr val="5B6373"/>
                 </a:solidFill>
                 <a:latin typeface="맑은 고딕"/>
+                <a:ea typeface="맑은 고딕"/>
+                <a:cs typeface="맑은 고딕"/>
               </a:rPr>
               <a:t>클라우드인프라관리  ·  2주차 2차시</a:t>
             </a:r>
@@ -8140,6 +8262,8 @@
                   <a:srgbClr val="5B6373"/>
                 </a:solidFill>
                 <a:latin typeface="맑은 고딕"/>
+                <a:ea typeface="맑은 고딕"/>
+                <a:cs typeface="맑은 고딕"/>
               </a:rPr>
               <a:t>05 / 12</a:t>
             </a:r>
@@ -8343,6 +8467,8 @@
                   <a:srgbClr val="14213D"/>
                 </a:solidFill>
                 <a:latin typeface="맑은 고딕"/>
+                <a:ea typeface="맑은 고딕"/>
+                <a:cs typeface="맑은 고딕"/>
               </a:rPr>
               <a:t>PART 02</a:t>
             </a:r>
@@ -8378,6 +8504,8 @@
                   <a:srgbClr val="FFFFFF"/>
                 </a:solidFill>
                 <a:latin typeface="맑은 고딕"/>
+                <a:ea typeface="맑은 고딕"/>
+                <a:cs typeface="맑은 고딕"/>
               </a:rPr>
               <a:t>Bind Mount</a:t>
             </a:r>
@@ -8413,6 +8541,8 @@
                   <a:srgbClr val="C9D3E6"/>
                 </a:solidFill>
                 <a:latin typeface="맑은 고딕"/>
+                <a:ea typeface="맑은 고딕"/>
+                <a:cs typeface="맑은 고딕"/>
               </a:rPr>
               <a:t>VM 디렉토리를 컨테이너에 연결하기</a:t>
             </a:r>
@@ -8572,6 +8702,8 @@
                   <a:srgbClr val="14213D"/>
                 </a:solidFill>
                 <a:latin typeface="맑은 고딕"/>
+                <a:ea typeface="맑은 고딕"/>
+                <a:cs typeface="맑은 고딕"/>
               </a:rPr>
               <a:t>02</a:t>
             </a:r>
@@ -8607,6 +8739,8 @@
                   <a:srgbClr val="14B8A6"/>
                 </a:solidFill>
                 <a:latin typeface="맑은 고딕"/>
+                <a:ea typeface="맑은 고딕"/>
+                <a:cs typeface="맑은 고딕"/>
               </a:rPr>
               <a:t>PART 2 · Bind Mount</a:t>
             </a:r>
@@ -8642,6 +8776,8 @@
                   <a:srgbClr val="FFFFFF"/>
                 </a:solidFill>
                 <a:latin typeface="맑은 고딕"/>
+                <a:ea typeface="맑은 고딕"/>
+                <a:cs typeface="맑은 고딕"/>
               </a:rPr>
               <a:t>Bind Mount란?</a:t>
             </a:r>
@@ -8681,6 +8817,8 @@
                   <a:srgbClr val="0D9488"/>
                 </a:solidFill>
                 <a:latin typeface="맑은 고딕"/>
+                <a:ea typeface="맑은 고딕"/>
+                <a:cs typeface="맑은 고딕"/>
               </a:rPr>
               <a:t>●  </a:t>
             </a:r>
@@ -8690,6 +8828,8 @@
                   <a:srgbClr val="222733"/>
                 </a:solidFill>
                 <a:latin typeface="맑은 고딕"/>
+                <a:ea typeface="맑은 고딕"/>
+                <a:cs typeface="맑은 고딕"/>
               </a:rPr>
               <a:t>VM(호스트)의 특정 디렉토리를 컨테이너 내부 경로에 그대로 연결</a:t>
             </a:r>
@@ -8706,6 +8846,8 @@
                   <a:srgbClr val="0D9488"/>
                 </a:solidFill>
                 <a:latin typeface="맑은 고딕"/>
+                <a:ea typeface="맑은 고딕"/>
+                <a:cs typeface="맑은 고딕"/>
               </a:rPr>
               <a:t>●  </a:t>
             </a:r>
@@ -8715,6 +8857,8 @@
                   <a:srgbClr val="222733"/>
                 </a:solidFill>
                 <a:latin typeface="맑은 고딕"/>
+                <a:ea typeface="맑은 고딕"/>
+                <a:cs typeface="맑은 고딕"/>
               </a:rPr>
               <a:t>컨테이너에서 그 경로에 쓴 파일 = VM에 실제로 저장된 파일</a:t>
             </a:r>
@@ -8731,6 +8875,8 @@
                   <a:srgbClr val="0D9488"/>
                 </a:solidFill>
                 <a:latin typeface="맑은 고딕"/>
+                <a:ea typeface="맑은 고딕"/>
+                <a:cs typeface="맑은 고딕"/>
               </a:rPr>
               <a:t>●  </a:t>
             </a:r>
@@ -8740,6 +8886,8 @@
                   <a:srgbClr val="222733"/>
                 </a:solidFill>
                 <a:latin typeface="맑은 고딕"/>
+                <a:ea typeface="맑은 고딕"/>
+                <a:cs typeface="맑은 고딕"/>
               </a:rPr>
               <a:t>컨테이너를 지워도 VM에 있는 원본 데이터는 그대로 남음</a:t>
             </a:r>
@@ -8775,6 +8923,8 @@
                   <a:srgbClr val="14213D"/>
                 </a:solidFill>
                 <a:latin typeface="맑은 고딕"/>
+                <a:ea typeface="맑은 고딕"/>
+                <a:cs typeface="맑은 고딕"/>
               </a:rPr>
               <a:t>연결 구조</a:t>
             </a:r>
@@ -8854,6 +9004,8 @@
                   <a:srgbClr val="FFFFFF"/>
                 </a:solidFill>
                 <a:latin typeface="맑은 고딕"/>
+                <a:ea typeface="맑은 고딕"/>
+                <a:cs typeface="맑은 고딕"/>
               </a:rPr>
               <a:t>VM: ~/html 디렉토리</a:t>
             </a:r>
@@ -8933,6 +9085,8 @@
                   <a:srgbClr val="FFFFFF"/>
                 </a:solidFill>
                 <a:latin typeface="맑은 고딕"/>
+                <a:ea typeface="맑은 고딕"/>
+                <a:cs typeface="맑은 고딕"/>
               </a:rPr>
               <a:t>↕  (Bind Mount)</a:t>
             </a:r>
@@ -9012,6 +9166,8 @@
                   <a:srgbClr val="FFFFFF"/>
                 </a:solidFill>
                 <a:latin typeface="맑은 고딕"/>
+                <a:ea typeface="맑은 고딕"/>
+                <a:cs typeface="맑은 고딕"/>
               </a:rPr>
               <a:t>컨테이너: /usr/share/nginx/html</a:t>
             </a:r>
@@ -9047,6 +9203,8 @@
                   <a:srgbClr val="5B6373"/>
                 </a:solidFill>
                 <a:latin typeface="맑은 고딕"/>
+                <a:ea typeface="맑은 고딕"/>
+                <a:cs typeface="맑은 고딕"/>
               </a:rPr>
               <a:t>클라우드인프라관리  ·  2주차 2차시</a:t>
             </a:r>
@@ -9082,6 +9240,8 @@
                   <a:srgbClr val="5B6373"/>
                 </a:solidFill>
                 <a:latin typeface="맑은 고딕"/>
+                <a:ea typeface="맑은 고딕"/>
+                <a:cs typeface="맑은 고딕"/>
               </a:rPr>
               <a:t>07 / 12</a:t>
             </a:r>
@@ -9285,6 +9445,8 @@
                   <a:srgbClr val="14213D"/>
                 </a:solidFill>
                 <a:latin typeface="맑은 고딕"/>
+                <a:ea typeface="맑은 고딕"/>
+                <a:cs typeface="맑은 고딕"/>
               </a:rPr>
               <a:t>02</a:t>
             </a:r>
@@ -9320,6 +9482,8 @@
                   <a:srgbClr val="14B8A6"/>
                 </a:solidFill>
                 <a:latin typeface="맑은 고딕"/>
+                <a:ea typeface="맑은 고딕"/>
+                <a:cs typeface="맑은 고딕"/>
               </a:rPr>
               <a:t>PART 2 · Bind Mount</a:t>
             </a:r>
@@ -9355,6 +9519,8 @@
                   <a:srgbClr val="FFFFFF"/>
                 </a:solidFill>
                 <a:latin typeface="맑은 고딕"/>
+                <a:ea typeface="맑은 고딕"/>
+                <a:cs typeface="맑은 고딕"/>
               </a:rPr>
               <a:t>-v 옵션 문법</a:t>
             </a:r>
@@ -9394,6 +9560,8 @@
                   <a:srgbClr val="0D9488"/>
                 </a:solidFill>
                 <a:latin typeface="맑은 고딕"/>
+                <a:ea typeface="맑은 고딕"/>
+                <a:cs typeface="맑은 고딕"/>
               </a:rPr>
               <a:t>●  </a:t>
             </a:r>
@@ -9403,6 +9571,8 @@
                   <a:srgbClr val="222733"/>
                 </a:solidFill>
                 <a:latin typeface="맑은 고딕"/>
+                <a:ea typeface="맑은 고딕"/>
+                <a:cs typeface="맑은 고딕"/>
               </a:rPr>
               <a:t>docker run -v {VM 경로}:{컨테이너 경로} {이미지}</a:t>
             </a:r>
@@ -9419,6 +9589,8 @@
                   <a:srgbClr val="0D9488"/>
                 </a:solidFill>
                 <a:latin typeface="맑은 고딕"/>
+                <a:ea typeface="맑은 고딕"/>
+                <a:cs typeface="맑은 고딕"/>
               </a:rPr>
               <a:t>●  </a:t>
             </a:r>
@@ -9428,6 +9600,8 @@
                   <a:srgbClr val="222733"/>
                 </a:solidFill>
                 <a:latin typeface="맑은 고딕"/>
+                <a:ea typeface="맑은 고딕"/>
+                <a:cs typeface="맑은 고딕"/>
               </a:rPr>
               <a:t>예: -v ~/html:/usr/share/nginx/html</a:t>
             </a:r>
@@ -9444,6 +9618,8 @@
                   <a:srgbClr val="0D9488"/>
                 </a:solidFill>
                 <a:latin typeface="맑은 고딕"/>
+                <a:ea typeface="맑은 고딕"/>
+                <a:cs typeface="맑은 고딕"/>
               </a:rPr>
               <a:t>●  </a:t>
             </a:r>
@@ -9453,6 +9629,8 @@
                   <a:srgbClr val="222733"/>
                 </a:solidFill>
                 <a:latin typeface="맑은 고딕"/>
+                <a:ea typeface="맑은 고딕"/>
+                <a:cs typeface="맑은 고딕"/>
               </a:rPr>
               <a:t>콜론(:) 왼쪽 = VM 쪽 경로, 오른쪽 = 컨테이너 안 경로</a:t>
             </a:r>
@@ -9469,6 +9647,8 @@
                   <a:srgbClr val="0D9488"/>
                 </a:solidFill>
                 <a:latin typeface="맑은 고딕"/>
+                <a:ea typeface="맑은 고딕"/>
+                <a:cs typeface="맑은 고딕"/>
               </a:rPr>
               <a:t>●  </a:t>
             </a:r>
@@ -9478,6 +9658,8 @@
                   <a:srgbClr val="222733"/>
                 </a:solidFill>
                 <a:latin typeface="맑은 고딕"/>
+                <a:ea typeface="맑은 고딕"/>
+                <a:cs typeface="맑은 고딕"/>
               </a:rPr>
               <a:t>nginx는 /usr/share/nginx/html 안의 파일을 웹 페이지로 보여줌</a:t>
             </a:r>
@@ -9513,6 +9695,8 @@
                   <a:srgbClr val="5B6373"/>
                 </a:solidFill>
                 <a:latin typeface="맑은 고딕"/>
+                <a:ea typeface="맑은 고딕"/>
+                <a:cs typeface="맑은 고딕"/>
               </a:rPr>
               <a:t>클라우드인프라관리  ·  2주차 2차시</a:t>
             </a:r>
@@ -9548,6 +9732,8 @@
                   <a:srgbClr val="5B6373"/>
                 </a:solidFill>
                 <a:latin typeface="맑은 고딕"/>
+                <a:ea typeface="맑은 고딕"/>
+                <a:cs typeface="맑은 고딕"/>
               </a:rPr>
               <a:t>08 / 12</a:t>
             </a:r>
@@ -9751,6 +9937,8 @@
                   <a:srgbClr val="14213D"/>
                 </a:solidFill>
                 <a:latin typeface="맑은 고딕"/>
+                <a:ea typeface="맑은 고딕"/>
+                <a:cs typeface="맑은 고딕"/>
               </a:rPr>
               <a:t>03</a:t>
             </a:r>
@@ -9786,6 +9974,8 @@
                   <a:srgbClr val="14B8A6"/>
                 </a:solidFill>
                 <a:latin typeface="맑은 고딕"/>
+                <a:ea typeface="맑은 고딕"/>
+                <a:cs typeface="맑은 고딕"/>
               </a:rPr>
               <a:t>실습 안내</a:t>
             </a:r>
@@ -9821,6 +10011,8 @@
                   <a:srgbClr val="FFFFFF"/>
                 </a:solidFill>
                 <a:latin typeface="맑은 고딕"/>
+                <a:ea typeface="맑은 고딕"/>
+                <a:cs typeface="맑은 고딕"/>
               </a:rPr>
               <a:t>Killercoda — Bind Mount 실습</a:t>
             </a:r>
@@ -9860,6 +10052,8 @@
                   <a:srgbClr val="0D9488"/>
                 </a:solidFill>
                 <a:latin typeface="맑은 고딕"/>
+                <a:ea typeface="맑은 고딕"/>
+                <a:cs typeface="맑은 고딕"/>
               </a:rPr>
               <a:t>●  </a:t>
             </a:r>
@@ -9869,6 +10063,8 @@
                   <a:srgbClr val="222733"/>
                 </a:solidFill>
                 <a:latin typeface="맑은 고딕"/>
+                <a:ea typeface="맑은 고딕"/>
+                <a:cs typeface="맑은 고딕"/>
               </a:rPr>
               <a:t>mkdir -p ~/html</a:t>
             </a:r>
@@ -9885,6 +10081,8 @@
                   <a:srgbClr val="0D9488"/>
                 </a:solidFill>
                 <a:latin typeface="맑은 고딕"/>
+                <a:ea typeface="맑은 고딕"/>
+                <a:cs typeface="맑은 고딕"/>
               </a:rPr>
               <a:t>●  </a:t>
             </a:r>
@@ -9894,6 +10092,8 @@
                   <a:srgbClr val="222733"/>
                 </a:solidFill>
                 <a:latin typeface="맑은 고딕"/>
+                <a:ea typeface="맑은 고딕"/>
+                <a:cs typeface="맑은 고딕"/>
               </a:rPr>
               <a:t>echo '&lt;h1&gt;Hello Cloud!&lt;/h1&gt;' &gt; ~/html/index.html</a:t>
             </a:r>
@@ -9910,6 +10110,8 @@
                   <a:srgbClr val="0D9488"/>
                 </a:solidFill>
                 <a:latin typeface="맑은 고딕"/>
+                <a:ea typeface="맑은 고딕"/>
+                <a:cs typeface="맑은 고딕"/>
               </a:rPr>
               <a:t>●  </a:t>
             </a:r>
@@ -9919,6 +10121,8 @@
                   <a:srgbClr val="222733"/>
                 </a:solidFill>
                 <a:latin typeface="맑은 고딕"/>
+                <a:ea typeface="맑은 고딕"/>
+                <a:cs typeface="맑은 고딕"/>
               </a:rPr>
               <a:t>docker run -d -p 8080:80 -v ~/html:/usr/share/nginx/html --name webvol nginx</a:t>
             </a:r>
@@ -9935,6 +10139,8 @@
                   <a:srgbClr val="0D9488"/>
                 </a:solidFill>
                 <a:latin typeface="맑은 고딕"/>
+                <a:ea typeface="맑은 고딕"/>
+                <a:cs typeface="맑은 고딕"/>
               </a:rPr>
               <a:t>●  </a:t>
             </a:r>
@@ -9944,6 +10150,8 @@
                   <a:srgbClr val="222733"/>
                 </a:solidFill>
                 <a:latin typeface="맑은 고딕"/>
+                <a:ea typeface="맑은 고딕"/>
+                <a:cs typeface="맑은 고딕"/>
               </a:rPr>
               <a:t>curl localhost:8080  →  "Hello Cloud!" 출력 확인</a:t>
             </a:r>
@@ -9979,6 +10187,8 @@
                   <a:srgbClr val="5B6373"/>
                 </a:solidFill>
                 <a:latin typeface="맑은 고딕"/>
+                <a:ea typeface="맑은 고딕"/>
+                <a:cs typeface="맑은 고딕"/>
               </a:rPr>
               <a:t>클라우드인프라관리  ·  2주차 2차시</a:t>
             </a:r>
@@ -10014,6 +10224,8 @@
                   <a:srgbClr val="5B6373"/>
                 </a:solidFill>
                 <a:latin typeface="맑은 고딕"/>
+                <a:ea typeface="맑은 고딕"/>
+                <a:cs typeface="맑은 고딕"/>
               </a:rPr>
               <a:t>09 / 12</a:t>
             </a:r>
